--- a/data-eng/decks/w6d4s1.pptx
+++ b/data-eng/decks/w6d4s1.pptx
@@ -3100,7 +3100,7 @@
       <p:grpSpPr/>
       <p:sp>
         <p:nvSpPr>
-          <p:cNvPr id="2" name="Oval 1"/>
+          <p:cNvPr id="2" name="deckgen:decor"/>
           <p:cNvSpPr/>
           <p:nvPr/>
         </p:nvSpPr>
@@ -3130,7 +3130,7 @@
       </p:sp>
       <p:sp>
         <p:nvSpPr>
-          <p:cNvPr id="3" name="Oval 2"/>
+          <p:cNvPr id="3" name="deckgen:decor"/>
           <p:cNvSpPr/>
           <p:nvPr/>
         </p:nvSpPr>
@@ -3160,7 +3160,7 @@
       </p:sp>
       <p:sp>
         <p:nvSpPr>
-          <p:cNvPr id="4" name="Oval 3"/>
+          <p:cNvPr id="4" name="deckgen:decor"/>
           <p:cNvSpPr/>
           <p:nvPr/>
         </p:nvSpPr>
@@ -3190,7 +3190,7 @@
       </p:sp>
       <p:sp>
         <p:nvSpPr>
-          <p:cNvPr id="5" name="Rectangle 4"/>
+          <p:cNvPr id="5" name="deckgen:decor"/>
           <p:cNvSpPr/>
           <p:nvPr/>
         </p:nvSpPr>
@@ -3220,7 +3220,7 @@
       </p:sp>
       <p:sp>
         <p:nvSpPr>
-          <p:cNvPr id="6" name="Oval 5"/>
+          <p:cNvPr id="6" name="deckgen:decor"/>
           <p:cNvSpPr/>
           <p:nvPr/>
         </p:nvSpPr>
@@ -3250,7 +3250,7 @@
       </p:sp>
       <p:sp>
         <p:nvSpPr>
-          <p:cNvPr id="7" name="Oval 6"/>
+          <p:cNvPr id="7" name="deckgen:decor"/>
           <p:cNvSpPr/>
           <p:nvPr/>
         </p:nvSpPr>
@@ -3280,7 +3280,7 @@
       </p:sp>
       <p:sp>
         <p:nvSpPr>
-          <p:cNvPr id="8" name="Oval 7"/>
+          <p:cNvPr id="8" name="deckgen:decor"/>
           <p:cNvSpPr/>
           <p:nvPr/>
         </p:nvSpPr>
@@ -3310,7 +3310,7 @@
       </p:sp>
       <p:sp>
         <p:nvSpPr>
-          <p:cNvPr id="9" name="Oval 8"/>
+          <p:cNvPr id="9" name="deckgen:decor"/>
           <p:cNvSpPr/>
           <p:nvPr/>
         </p:nvSpPr>
@@ -3340,7 +3340,7 @@
       </p:sp>
       <p:sp>
         <p:nvSpPr>
-          <p:cNvPr id="10" name="Rectangle 9"/>
+          <p:cNvPr id="10" name="deckgen:decor"/>
           <p:cNvSpPr/>
           <p:nvPr/>
         </p:nvSpPr>
@@ -3618,7 +3618,7 @@
       <p:grpSpPr/>
       <p:sp>
         <p:nvSpPr>
-          <p:cNvPr id="2" name="Oval 1"/>
+          <p:cNvPr id="2" name="deckgen:decor"/>
           <p:cNvSpPr/>
           <p:nvPr/>
         </p:nvSpPr>
@@ -3648,7 +3648,7 @@
       </p:sp>
       <p:sp>
         <p:nvSpPr>
-          <p:cNvPr id="3" name="Oval 2"/>
+          <p:cNvPr id="3" name="deckgen:decor"/>
           <p:cNvSpPr/>
           <p:nvPr/>
         </p:nvSpPr>
@@ -3678,7 +3678,7 @@
       </p:sp>
       <p:sp>
         <p:nvSpPr>
-          <p:cNvPr id="4" name="Oval 3"/>
+          <p:cNvPr id="4" name="deckgen:decor"/>
           <p:cNvSpPr/>
           <p:nvPr/>
         </p:nvSpPr>
@@ -4826,7 +4826,7 @@
       <p:grpSpPr/>
       <p:sp>
         <p:nvSpPr>
-          <p:cNvPr id="2" name="Oval 1"/>
+          <p:cNvPr id="2" name="deckgen:decor"/>
           <p:cNvSpPr/>
           <p:nvPr/>
         </p:nvSpPr>
@@ -4856,7 +4856,7 @@
       </p:sp>
       <p:sp>
         <p:nvSpPr>
-          <p:cNvPr id="3" name="Oval 2"/>
+          <p:cNvPr id="3" name="deckgen:decor"/>
           <p:cNvSpPr/>
           <p:nvPr/>
         </p:nvSpPr>
@@ -5079,7 +5079,7 @@
         </p:nvSpPr>
         <p:spPr>
           <a:xfrm>
-            <a:off x="1428750" y="5486400"/>
+            <a:off x="1428750" y="5476875"/>
             <a:ext cx="419100" cy="381000"/>
           </a:xfrm>
           <a:prstGeom prst="rect">
@@ -5120,7 +5120,7 @@
         </p:nvSpPr>
         <p:spPr>
           <a:xfrm>
-            <a:off x="1905000" y="5486400"/>
+            <a:off x="1905000" y="5476875"/>
             <a:ext cx="6724650" cy="381000"/>
           </a:xfrm>
           <a:prstGeom prst="rect">
@@ -5195,7 +5195,7 @@
         </p:nvSpPr>
         <p:spPr>
           <a:xfrm>
-            <a:off x="9658350" y="5486400"/>
+            <a:off x="9658350" y="5476875"/>
             <a:ext cx="419100" cy="381000"/>
           </a:xfrm>
           <a:prstGeom prst="rect">
@@ -5236,7 +5236,7 @@
         </p:nvSpPr>
         <p:spPr>
           <a:xfrm>
-            <a:off x="10134600" y="5486400"/>
+            <a:off x="10134600" y="5476875"/>
             <a:ext cx="6724650" cy="381000"/>
           </a:xfrm>
           <a:prstGeom prst="rect">
@@ -5311,7 +5311,7 @@
         </p:nvSpPr>
         <p:spPr>
           <a:xfrm>
-            <a:off x="1428750" y="6515100"/>
+            <a:off x="1428750" y="6505575"/>
             <a:ext cx="419100" cy="381000"/>
           </a:xfrm>
           <a:prstGeom prst="rect">
@@ -5352,7 +5352,7 @@
         </p:nvSpPr>
         <p:spPr>
           <a:xfrm>
-            <a:off x="1905000" y="6515100"/>
+            <a:off x="1905000" y="6505575"/>
             <a:ext cx="6724650" cy="381000"/>
           </a:xfrm>
           <a:prstGeom prst="rect">
@@ -5427,7 +5427,7 @@
         </p:nvSpPr>
         <p:spPr>
           <a:xfrm>
-            <a:off x="9658350" y="6515100"/>
+            <a:off x="9658350" y="6505575"/>
             <a:ext cx="419100" cy="381000"/>
           </a:xfrm>
           <a:prstGeom prst="rect">
@@ -5468,7 +5468,7 @@
         </p:nvSpPr>
         <p:spPr>
           <a:xfrm>
-            <a:off x="10134600" y="6515100"/>
+            <a:off x="10134600" y="6505575"/>
             <a:ext cx="6724650" cy="381000"/>
           </a:xfrm>
           <a:prstGeom prst="rect">
@@ -5633,7 +5633,7 @@
       <p:grpSpPr/>
       <p:sp>
         <p:nvSpPr>
-          <p:cNvPr id="2" name="Oval 1"/>
+          <p:cNvPr id="2" name="deckgen:decor"/>
           <p:cNvSpPr/>
           <p:nvPr/>
         </p:nvSpPr>
@@ -5663,7 +5663,7 @@
       </p:sp>
       <p:sp>
         <p:nvSpPr>
-          <p:cNvPr id="3" name="Oval 2"/>
+          <p:cNvPr id="3" name="deckgen:decor"/>
           <p:cNvSpPr/>
           <p:nvPr/>
         </p:nvSpPr>
@@ -5693,7 +5693,7 @@
       </p:sp>
       <p:sp>
         <p:nvSpPr>
-          <p:cNvPr id="4" name="Oval 3"/>
+          <p:cNvPr id="4" name="deckgen:decor"/>
           <p:cNvSpPr/>
           <p:nvPr/>
         </p:nvSpPr>
@@ -6624,7 +6624,7 @@
       <p:grpSpPr/>
       <p:sp>
         <p:nvSpPr>
-          <p:cNvPr id="2" name="Oval 1"/>
+          <p:cNvPr id="2" name="deckgen:decor"/>
           <p:cNvSpPr/>
           <p:nvPr/>
         </p:nvSpPr>
@@ -6654,7 +6654,7 @@
       </p:sp>
       <p:sp>
         <p:nvSpPr>
-          <p:cNvPr id="3" name="Oval 2"/>
+          <p:cNvPr id="3" name="deckgen:decor"/>
           <p:cNvSpPr/>
           <p:nvPr/>
         </p:nvSpPr>
@@ -6684,7 +6684,7 @@
       </p:sp>
       <p:sp>
         <p:nvSpPr>
-          <p:cNvPr id="4" name="Oval 3"/>
+          <p:cNvPr id="4" name="deckgen:decor"/>
           <p:cNvSpPr/>
           <p:nvPr/>
         </p:nvSpPr>
@@ -8012,7 +8012,7 @@
       <p:grpSpPr/>
       <p:sp>
         <p:nvSpPr>
-          <p:cNvPr id="2" name="Oval 1"/>
+          <p:cNvPr id="2" name="deckgen:decor"/>
           <p:cNvSpPr/>
           <p:nvPr/>
         </p:nvSpPr>
@@ -8042,7 +8042,7 @@
       </p:sp>
       <p:sp>
         <p:nvSpPr>
-          <p:cNvPr id="3" name="Oval 2"/>
+          <p:cNvPr id="3" name="deckgen:decor"/>
           <p:cNvSpPr/>
           <p:nvPr/>
         </p:nvSpPr>
@@ -8072,7 +8072,7 @@
       </p:sp>
       <p:sp>
         <p:nvSpPr>
-          <p:cNvPr id="4" name="Oval 3"/>
+          <p:cNvPr id="4" name="deckgen:decor"/>
           <p:cNvSpPr/>
           <p:nvPr/>
         </p:nvSpPr>
@@ -9948,7 +9948,7 @@
       <p:grpSpPr/>
       <p:sp>
         <p:nvSpPr>
-          <p:cNvPr id="2" name="Oval 1"/>
+          <p:cNvPr id="2" name="deckgen:decor"/>
           <p:cNvSpPr/>
           <p:nvPr/>
         </p:nvSpPr>
@@ -9978,7 +9978,7 @@
       </p:sp>
       <p:sp>
         <p:nvSpPr>
-          <p:cNvPr id="3" name="Oval 2"/>
+          <p:cNvPr id="3" name="deckgen:decor"/>
           <p:cNvSpPr/>
           <p:nvPr/>
         </p:nvSpPr>
@@ -10008,7 +10008,7 @@
       </p:sp>
       <p:sp>
         <p:nvSpPr>
-          <p:cNvPr id="4" name="Oval 3"/>
+          <p:cNvPr id="4" name="deckgen:decor"/>
           <p:cNvSpPr/>
           <p:nvPr/>
         </p:nvSpPr>
@@ -10214,7 +10214,7 @@
       </p:sp>
       <p:sp>
         <p:nvSpPr>
-          <p:cNvPr id="10" name="TextBox 9"/>
+          <p:cNvPr id="10" name="deckgen:ornament"/>
           <p:cNvSpPr txBox="1"/>
           <p:nvPr/>
         </p:nvSpPr>
@@ -10399,7 +10399,7 @@
       </p:sp>
       <p:sp>
         <p:nvSpPr>
-          <p:cNvPr id="14" name="TextBox 13"/>
+          <p:cNvPr id="14" name="deckgen:ornament"/>
           <p:cNvSpPr txBox="1"/>
           <p:nvPr/>
         </p:nvSpPr>
@@ -10584,7 +10584,7 @@
       </p:sp>
       <p:sp>
         <p:nvSpPr>
-          <p:cNvPr id="18" name="TextBox 17"/>
+          <p:cNvPr id="18" name="deckgen:ornament"/>
           <p:cNvSpPr txBox="1"/>
           <p:nvPr/>
         </p:nvSpPr>
@@ -10769,7 +10769,7 @@
       </p:sp>
       <p:sp>
         <p:nvSpPr>
-          <p:cNvPr id="22" name="TextBox 21"/>
+          <p:cNvPr id="22" name="deckgen:ornament"/>
           <p:cNvSpPr txBox="1"/>
           <p:nvPr/>
         </p:nvSpPr>
@@ -11091,7 +11091,7 @@
       <p:grpSpPr/>
       <p:sp>
         <p:nvSpPr>
-          <p:cNvPr id="2" name="Oval 1"/>
+          <p:cNvPr id="2" name="deckgen:decor"/>
           <p:cNvSpPr/>
           <p:nvPr/>
         </p:nvSpPr>
@@ -11121,7 +11121,7 @@
       </p:sp>
       <p:sp>
         <p:nvSpPr>
-          <p:cNvPr id="3" name="Oval 2"/>
+          <p:cNvPr id="3" name="deckgen:decor"/>
           <p:cNvSpPr/>
           <p:nvPr/>
         </p:nvSpPr>
@@ -11151,7 +11151,7 @@
       </p:sp>
       <p:sp>
         <p:nvSpPr>
-          <p:cNvPr id="4" name="Oval 3"/>
+          <p:cNvPr id="4" name="deckgen:decor"/>
           <p:cNvSpPr/>
           <p:nvPr/>
         </p:nvSpPr>
@@ -12118,7 +12118,7 @@
       <p:grpSpPr/>
       <p:sp>
         <p:nvSpPr>
-          <p:cNvPr id="2" name="Oval 1"/>
+          <p:cNvPr id="2" name="deckgen:decor"/>
           <p:cNvSpPr/>
           <p:nvPr/>
         </p:nvSpPr>
@@ -12148,7 +12148,7 @@
       </p:sp>
       <p:sp>
         <p:nvSpPr>
-          <p:cNvPr id="3" name="Oval 2"/>
+          <p:cNvPr id="3" name="deckgen:decor"/>
           <p:cNvSpPr/>
           <p:nvPr/>
         </p:nvSpPr>
@@ -12178,7 +12178,7 @@
       </p:sp>
       <p:sp>
         <p:nvSpPr>
-          <p:cNvPr id="4" name="Oval 3"/>
+          <p:cNvPr id="4" name="deckgen:decor"/>
           <p:cNvSpPr/>
           <p:nvPr/>
         </p:nvSpPr>
@@ -13975,7 +13975,7 @@
       <p:grpSpPr/>
       <p:sp>
         <p:nvSpPr>
-          <p:cNvPr id="2" name="Oval 1"/>
+          <p:cNvPr id="2" name="deckgen:decor"/>
           <p:cNvSpPr/>
           <p:nvPr/>
         </p:nvSpPr>
@@ -14005,7 +14005,7 @@
       </p:sp>
       <p:sp>
         <p:nvSpPr>
-          <p:cNvPr id="3" name="Oval 2"/>
+          <p:cNvPr id="3" name="deckgen:decor"/>
           <p:cNvSpPr/>
           <p:nvPr/>
         </p:nvSpPr>
@@ -14035,7 +14035,7 @@
       </p:sp>
       <p:sp>
         <p:nvSpPr>
-          <p:cNvPr id="4" name="Oval 3"/>
+          <p:cNvPr id="4" name="deckgen:decor"/>
           <p:cNvSpPr/>
           <p:nvPr/>
         </p:nvSpPr>
@@ -15097,7 +15097,7 @@
       <p:grpSpPr/>
       <p:sp>
         <p:nvSpPr>
-          <p:cNvPr id="2" name="Oval 1"/>
+          <p:cNvPr id="2" name="deckgen:decor"/>
           <p:cNvSpPr/>
           <p:nvPr/>
         </p:nvSpPr>
@@ -15127,7 +15127,7 @@
       </p:sp>
       <p:sp>
         <p:nvSpPr>
-          <p:cNvPr id="3" name="Oval 2"/>
+          <p:cNvPr id="3" name="deckgen:decor"/>
           <p:cNvSpPr/>
           <p:nvPr/>
         </p:nvSpPr>
@@ -15157,7 +15157,7 @@
       </p:sp>
       <p:sp>
         <p:nvSpPr>
-          <p:cNvPr id="4" name="Oval 3"/>
+          <p:cNvPr id="4" name="deckgen:decor"/>
           <p:cNvSpPr/>
           <p:nvPr/>
         </p:nvSpPr>
